--- a/figures/figures.pptx
+++ b/figures/figures.pptx
@@ -178,7 +178,7 @@
   <pc:docChgLst>
     <pc:chgData name="Nicolas Cachanosky" userId="543990dc0ff5ce14" providerId="LiveId" clId="{8E4DE338-F192-4434-A2D2-74D62C08B308}"/>
     <pc:docChg chg="undo redo custSel addSld delSld modSld sldOrd addSection delSection modSection">
-      <pc:chgData name="Nicolas Cachanosky" userId="543990dc0ff5ce14" providerId="LiveId" clId="{8E4DE338-F192-4434-A2D2-74D62C08B308}" dt="2026-05-08T19:35:41.007" v="2454" actId="17846"/>
+      <pc:chgData name="Nicolas Cachanosky" userId="543990dc0ff5ce14" providerId="LiveId" clId="{8E4DE338-F192-4434-A2D2-74D62C08B308}" dt="2026-05-08T20:25:02.807" v="2525" actId="14100"/>
       <pc:docMkLst>
         <pc:docMk/>
       </pc:docMkLst>
@@ -1071,7 +1071,7 @@
         </pc:picChg>
       </pc:sldChg>
       <pc:sldChg chg="addSp delSp modSp add mod">
-        <pc:chgData name="Nicolas Cachanosky" userId="543990dc0ff5ce14" providerId="LiveId" clId="{8E4DE338-F192-4434-A2D2-74D62C08B308}" dt="2026-05-08T19:28:27.586" v="2181" actId="20577"/>
+        <pc:chgData name="Nicolas Cachanosky" userId="543990dc0ff5ce14" providerId="LiveId" clId="{8E4DE338-F192-4434-A2D2-74D62C08B308}" dt="2026-05-08T20:25:02.807" v="2525" actId="14100"/>
         <pc:sldMkLst>
           <pc:docMk/>
           <pc:sldMk cId="636427372" sldId="500"/>
@@ -1133,7 +1133,7 @@
           </ac:spMkLst>
         </pc:spChg>
         <pc:spChg chg="add mod topLvl">
-          <ac:chgData name="Nicolas Cachanosky" userId="543990dc0ff5ce14" providerId="LiveId" clId="{8E4DE338-F192-4434-A2D2-74D62C08B308}" dt="2026-05-08T18:52:40.892" v="2068" actId="12788"/>
+          <ac:chgData name="Nicolas Cachanosky" userId="543990dc0ff5ce14" providerId="LiveId" clId="{8E4DE338-F192-4434-A2D2-74D62C08B308}" dt="2026-05-08T20:24:44.127" v="2470" actId="14100"/>
           <ac:spMkLst>
             <pc:docMk/>
             <pc:sldMk cId="636427372" sldId="500"/>
@@ -1221,7 +1221,7 @@
           </ac:picMkLst>
         </pc:picChg>
         <pc:cxnChg chg="add mod topLvl">
-          <ac:chgData name="Nicolas Cachanosky" userId="543990dc0ff5ce14" providerId="LiveId" clId="{8E4DE338-F192-4434-A2D2-74D62C08B308}" dt="2026-05-08T18:52:40.892" v="2068" actId="12788"/>
+          <ac:chgData name="Nicolas Cachanosky" userId="543990dc0ff5ce14" providerId="LiveId" clId="{8E4DE338-F192-4434-A2D2-74D62C08B308}" dt="2026-05-08T20:25:02.807" v="2525" actId="14100"/>
           <ac:cxnSpMkLst>
             <pc:docMk/>
             <pc:sldMk cId="636427372" sldId="500"/>
@@ -5129,8 +5129,8 @@
         </p:nvSpPr>
         <p:spPr>
           <a:xfrm>
-            <a:off x="1240972" y="3969603"/>
-            <a:ext cx="9710057" cy="830997"/>
+            <a:off x="1524000" y="3969603"/>
+            <a:ext cx="9144000" cy="830997"/>
           </a:xfrm>
           <a:prstGeom prst="rect">
             <a:avLst/>
@@ -5150,7 +5150,7 @@
                   <a:schemeClr val="accent3"/>
                 </a:solidFill>
               </a:rPr>
-              <a:t>Money, Institutions, and Markets</a:t>
+              <a:t>The Precision Advantage</a:t>
             </a:r>
           </a:p>
         </p:txBody>
@@ -5171,8 +5171,8 @@
         </p:nvCxnSpPr>
         <p:spPr>
           <a:xfrm>
-            <a:off x="1524000" y="4800600"/>
-            <a:ext cx="9144000" cy="0"/>
+            <a:off x="2671484" y="4800600"/>
+            <a:ext cx="6858000" cy="0"/>
           </a:xfrm>
           <a:prstGeom prst="line">
             <a:avLst/>

--- a/figures/figures.pptx
+++ b/figures/figures.pptx
@@ -167,7 +167,7 @@
 <file path=ppt/revisionInfo.xml><?xml version="1.0" encoding="utf-8"?>
 <p1510:revInfo xmlns:a="http://schemas.openxmlformats.org/drawingml/2006/main" xmlns:r="http://schemas.openxmlformats.org/officeDocument/2006/relationships" xmlns:p1510="http://schemas.microsoft.com/office/powerpoint/2015/10/main">
   <p1510:revLst>
-    <p1510:client id="{6BF4ACE4-C389-497A-966E-C70F5097C5CC}" v="5" dt="2026-05-08T19:27:17.878"/>
+    <p1510:client id="{6BF4ACE4-C389-497A-966E-C70F5097C5CC}" v="6" dt="2026-05-08T20:53:42.504"/>
     <p1510:client id="{EFEBD115-5D17-4D70-91A9-A915A8692FE1}" v="427" dt="2026-05-08T18:50:45.284"/>
   </p1510:revLst>
 </p1510:revInfo>
@@ -178,7 +178,7 @@
   <pc:docChgLst>
     <pc:chgData name="Nicolas Cachanosky" userId="543990dc0ff5ce14" providerId="LiveId" clId="{8E4DE338-F192-4434-A2D2-74D62C08B308}"/>
     <pc:docChg chg="undo redo custSel addSld delSld modSld sldOrd addSection delSection modSection">
-      <pc:chgData name="Nicolas Cachanosky" userId="543990dc0ff5ce14" providerId="LiveId" clId="{8E4DE338-F192-4434-A2D2-74D62C08B308}" dt="2026-05-08T20:25:02.807" v="2525" actId="14100"/>
+      <pc:chgData name="Nicolas Cachanosky" userId="543990dc0ff5ce14" providerId="LiveId" clId="{8E4DE338-F192-4434-A2D2-74D62C08B308}" dt="2026-05-08T20:53:42.504" v="2526" actId="164"/>
       <pc:docMkLst>
         <pc:docMk/>
       </pc:docMkLst>
@@ -1071,7 +1071,7 @@
         </pc:picChg>
       </pc:sldChg>
       <pc:sldChg chg="addSp delSp modSp add mod">
-        <pc:chgData name="Nicolas Cachanosky" userId="543990dc0ff5ce14" providerId="LiveId" clId="{8E4DE338-F192-4434-A2D2-74D62C08B308}" dt="2026-05-08T20:25:02.807" v="2525" actId="14100"/>
+        <pc:chgData name="Nicolas Cachanosky" userId="543990dc0ff5ce14" providerId="LiveId" clId="{8E4DE338-F192-4434-A2D2-74D62C08B308}" dt="2026-05-08T20:53:42.504" v="2526" actId="164"/>
         <pc:sldMkLst>
           <pc:docMk/>
           <pc:sldMk cId="636427372" sldId="500"/>
@@ -1133,7 +1133,7 @@
           </ac:spMkLst>
         </pc:spChg>
         <pc:spChg chg="add mod topLvl">
-          <ac:chgData name="Nicolas Cachanosky" userId="543990dc0ff5ce14" providerId="LiveId" clId="{8E4DE338-F192-4434-A2D2-74D62C08B308}" dt="2026-05-08T20:24:44.127" v="2470" actId="14100"/>
+          <ac:chgData name="Nicolas Cachanosky" userId="543990dc0ff5ce14" providerId="LiveId" clId="{8E4DE338-F192-4434-A2D2-74D62C08B308}" dt="2026-05-08T20:53:42.504" v="2526" actId="164"/>
           <ac:spMkLst>
             <pc:docMk/>
             <pc:sldMk cId="636427372" sldId="500"/>
@@ -1141,7 +1141,7 @@
           </ac:spMkLst>
         </pc:spChg>
         <pc:spChg chg="add mod topLvl">
-          <ac:chgData name="Nicolas Cachanosky" userId="543990dc0ff5ce14" providerId="LiveId" clId="{8E4DE338-F192-4434-A2D2-74D62C08B308}" dt="2026-05-08T19:28:27.586" v="2181" actId="20577"/>
+          <ac:chgData name="Nicolas Cachanosky" userId="543990dc0ff5ce14" providerId="LiveId" clId="{8E4DE338-F192-4434-A2D2-74D62C08B308}" dt="2026-05-08T20:53:42.504" v="2526" actId="164"/>
           <ac:spMkLst>
             <pc:docMk/>
             <pc:sldMk cId="636427372" sldId="500"/>
@@ -1157,7 +1157,7 @@
           </ac:spMkLst>
         </pc:spChg>
         <pc:grpChg chg="add mod">
-          <ac:chgData name="Nicolas Cachanosky" userId="543990dc0ff5ce14" providerId="LiveId" clId="{8E4DE338-F192-4434-A2D2-74D62C08B308}" dt="2026-05-08T19:27:31.591" v="2117" actId="1076"/>
+          <ac:chgData name="Nicolas Cachanosky" userId="543990dc0ff5ce14" providerId="LiveId" clId="{8E4DE338-F192-4434-A2D2-74D62C08B308}" dt="2026-05-08T20:53:42.504" v="2526" actId="164"/>
           <ac:grpSpMkLst>
             <pc:docMk/>
             <pc:sldMk cId="636427372" sldId="500"/>
@@ -1172,6 +1172,14 @@
             <ac:grpSpMk id="10" creationId="{D82F9ED3-8202-919A-377C-F3EF8FD37F4E}"/>
           </ac:grpSpMkLst>
         </pc:grpChg>
+        <pc:grpChg chg="add mod">
+          <ac:chgData name="Nicolas Cachanosky" userId="543990dc0ff5ce14" providerId="LiveId" clId="{8E4DE338-F192-4434-A2D2-74D62C08B308}" dt="2026-05-08T20:53:42.504" v="2526" actId="164"/>
+          <ac:grpSpMkLst>
+            <pc:docMk/>
+            <pc:sldMk cId="636427372" sldId="500"/>
+            <ac:grpSpMk id="12" creationId="{9E132584-71A2-5E10-3846-6A5D178C3C4C}"/>
+          </ac:grpSpMkLst>
+        </pc:grpChg>
         <pc:grpChg chg="add del mod">
           <ac:chgData name="Nicolas Cachanosky" userId="543990dc0ff5ce14" providerId="LiveId" clId="{8E4DE338-F192-4434-A2D2-74D62C08B308}" dt="2026-05-08T18:50:45.284" v="2054" actId="165"/>
           <ac:grpSpMkLst>
@@ -1221,7 +1229,7 @@
           </ac:picMkLst>
         </pc:picChg>
         <pc:cxnChg chg="add mod topLvl">
-          <ac:chgData name="Nicolas Cachanosky" userId="543990dc0ff5ce14" providerId="LiveId" clId="{8E4DE338-F192-4434-A2D2-74D62C08B308}" dt="2026-05-08T20:25:02.807" v="2525" actId="14100"/>
+          <ac:chgData name="Nicolas Cachanosky" userId="543990dc0ff5ce14" providerId="LiveId" clId="{8E4DE338-F192-4434-A2D2-74D62C08B308}" dt="2026-05-08T20:53:42.504" v="2526" actId="164"/>
           <ac:cxnSpMkLst>
             <pc:docMk/>
             <pc:sldMk cId="636427372" sldId="500"/>
@@ -5115,151 +5123,12 @@
           </a:p>
         </p:txBody>
       </p:sp>
-      <p:sp>
-        <p:nvSpPr>
-          <p:cNvPr id="11" name="TextBox 10">
-            <a:extLst>
-              <a:ext uri="{FF2B5EF4-FFF2-40B4-BE49-F238E27FC236}">
-                <a16:creationId xmlns:a16="http://schemas.microsoft.com/office/drawing/2014/main" id="{79B2AEA3-38F5-2FE2-61AD-93E66E5CC27E}"/>
-              </a:ext>
-            </a:extLst>
-          </p:cNvPr>
-          <p:cNvSpPr txBox="1"/>
-          <p:nvPr/>
-        </p:nvSpPr>
-        <p:spPr>
-          <a:xfrm>
-            <a:off x="1524000" y="3969603"/>
-            <a:ext cx="9144000" cy="830997"/>
-          </a:xfrm>
-          <a:prstGeom prst="rect">
-            <a:avLst/>
-          </a:prstGeom>
-          <a:noFill/>
-        </p:spPr>
-        <p:txBody>
-          <a:bodyPr wrap="square" rtlCol="0">
-            <a:spAutoFit/>
-          </a:bodyPr>
-          <a:lstStyle/>
-          <a:p>
-            <a:pPr algn="ctr"/>
-            <a:r>
-              <a:rPr lang="en-US" sz="4800" dirty="0">
-                <a:solidFill>
-                  <a:schemeClr val="accent3"/>
-                </a:solidFill>
-              </a:rPr>
-              <a:t>The Precision Advantage</a:t>
-            </a:r>
-          </a:p>
-        </p:txBody>
-      </p:sp>
-      <p:cxnSp>
-        <p:nvCxnSpPr>
-          <p:cNvPr id="13" name="Straight Connector 12">
-            <a:extLst>
-              <a:ext uri="{FF2B5EF4-FFF2-40B4-BE49-F238E27FC236}">
-                <a16:creationId xmlns:a16="http://schemas.microsoft.com/office/drawing/2014/main" id="{9305F6D7-9415-4C36-F138-948C471C00C6}"/>
-              </a:ext>
-            </a:extLst>
-          </p:cNvPr>
-          <p:cNvCxnSpPr>
-            <a:cxnSpLocks/>
-          </p:cNvCxnSpPr>
-          <p:nvPr/>
-        </p:nvCxnSpPr>
-        <p:spPr>
-          <a:xfrm>
-            <a:off x="2671484" y="4800600"/>
-            <a:ext cx="6858000" cy="0"/>
-          </a:xfrm>
-          <a:prstGeom prst="line">
-            <a:avLst/>
-          </a:prstGeom>
-        </p:spPr>
-        <p:style>
-          <a:lnRef idx="2">
-            <a:schemeClr val="accent3"/>
-          </a:lnRef>
-          <a:fillRef idx="0">
-            <a:schemeClr val="accent3"/>
-          </a:fillRef>
-          <a:effectRef idx="1">
-            <a:schemeClr val="accent3"/>
-          </a:effectRef>
-          <a:fontRef idx="minor">
-            <a:schemeClr val="tx1"/>
-          </a:fontRef>
-        </p:style>
-      </p:cxnSp>
-      <p:sp>
-        <p:nvSpPr>
-          <p:cNvPr id="14" name="TextBox 13">
-            <a:extLst>
-              <a:ext uri="{FF2B5EF4-FFF2-40B4-BE49-F238E27FC236}">
-                <a16:creationId xmlns:a16="http://schemas.microsoft.com/office/drawing/2014/main" id="{EC5E5116-5B25-C17B-1419-8ED8183A0C34}"/>
-              </a:ext>
-            </a:extLst>
-          </p:cNvPr>
-          <p:cNvSpPr txBox="1"/>
-          <p:nvPr/>
-        </p:nvSpPr>
-        <p:spPr>
-          <a:xfrm>
-            <a:off x="2057400" y="4800600"/>
-            <a:ext cx="8077200" cy="830997"/>
-          </a:xfrm>
-          <a:prstGeom prst="rect">
-            <a:avLst/>
-          </a:prstGeom>
-          <a:noFill/>
-        </p:spPr>
-        <p:txBody>
-          <a:bodyPr wrap="square" rtlCol="0">
-            <a:spAutoFit/>
-          </a:bodyPr>
-          <a:lstStyle/>
-          <a:p>
-            <a:pPr algn="ctr"/>
-            <a:r>
-              <a:rPr lang="en-US" sz="2400" dirty="0">
-                <a:solidFill>
-                  <a:schemeClr val="bg1">
-                    <a:lumMod val="85000"/>
-                  </a:schemeClr>
-                </a:solidFill>
-                <a:latin typeface="Lato" panose="020F0502020204030203" pitchFamily="34" charset="0"/>
-                <a:ea typeface="Lato" panose="020F0502020204030203" pitchFamily="34" charset="0"/>
-                <a:cs typeface="Lato" panose="020F0502020204030203" pitchFamily="34" charset="0"/>
-              </a:rPr>
-              <a:t>XQMB 5311 · Quantitative Methods for Business</a:t>
-            </a:r>
-          </a:p>
-          <a:p>
-            <a:pPr algn="ctr"/>
-            <a:r>
-              <a:rPr lang="en-US" sz="2400" dirty="0">
-                <a:solidFill>
-                  <a:schemeClr val="bg1">
-                    <a:lumMod val="85000"/>
-                  </a:schemeClr>
-                </a:solidFill>
-                <a:latin typeface="Lato" panose="020F0502020204030203" pitchFamily="34" charset="0"/>
-                <a:ea typeface="Lato" panose="020F0502020204030203" pitchFamily="34" charset="0"/>
-                <a:cs typeface="Lato" panose="020F0502020204030203" pitchFamily="34" charset="0"/>
-              </a:rPr>
-              <a:t>Nicolas Cachanosky · UTEP · Center for Free Enterprise</a:t>
-            </a:r>
-          </a:p>
-        </p:txBody>
-      </p:sp>
       <p:grpSp>
         <p:nvGrpSpPr>
-          <p:cNvPr id="7" name="Group 6">
-            <a:extLst>
-              <a:ext uri="{FF2B5EF4-FFF2-40B4-BE49-F238E27FC236}">
-                <a16:creationId xmlns:a16="http://schemas.microsoft.com/office/drawing/2014/main" id="{1297BAF0-A8B4-D2F6-BB41-7C4CC8E27BE6}"/>
+          <p:cNvPr id="12" name="Group 11">
+            <a:extLst>
+              <a:ext uri="{FF2B5EF4-FFF2-40B4-BE49-F238E27FC236}">
+                <a16:creationId xmlns:a16="http://schemas.microsoft.com/office/drawing/2014/main" id="{9E132584-71A2-5E10-3846-6A5D178C3C4C}"/>
               </a:ext>
             </a:extLst>
           </p:cNvPr>
@@ -5268,99 +5137,259 @@
         </p:nvGrpSpPr>
         <p:grpSpPr>
           <a:xfrm>
-            <a:off x="4724400" y="1226403"/>
-            <a:ext cx="2743200" cy="2743200"/>
-            <a:chOff x="950068" y="1690688"/>
-            <a:chExt cx="4572000" cy="4572000"/>
+            <a:off x="1524000" y="1226403"/>
+            <a:ext cx="9144000" cy="4405194"/>
+            <a:chOff x="1524000" y="1226403"/>
+            <a:chExt cx="9144000" cy="4405194"/>
           </a:xfrm>
         </p:grpSpPr>
         <p:sp>
           <p:nvSpPr>
-            <p:cNvPr id="5" name="Oval 4">
+            <p:cNvPr id="11" name="TextBox 10">
               <a:extLst>
                 <a:ext uri="{FF2B5EF4-FFF2-40B4-BE49-F238E27FC236}">
-                  <a16:creationId xmlns:a16="http://schemas.microsoft.com/office/drawing/2014/main" id="{A2A6BC05-A39F-DEF3-52E5-DC2D64581866}"/>
+                  <a16:creationId xmlns:a16="http://schemas.microsoft.com/office/drawing/2014/main" id="{79B2AEA3-38F5-2FE2-61AD-93E66E5CC27E}"/>
                 </a:ext>
               </a:extLst>
             </p:cNvPr>
-            <p:cNvSpPr/>
+            <p:cNvSpPr txBox="1"/>
             <p:nvPr/>
           </p:nvSpPr>
           <p:spPr>
             <a:xfrm>
-              <a:off x="950068" y="1690688"/>
-              <a:ext cx="4572000" cy="4572000"/>
-            </a:xfrm>
-            <a:prstGeom prst="ellipse">
-              <a:avLst/>
-            </a:prstGeom>
-            <a:noFill/>
-            <a:ln w="101600">
-              <a:solidFill>
-                <a:schemeClr val="accent3"/>
-              </a:solidFill>
-            </a:ln>
-          </p:spPr>
-          <p:style>
-            <a:lnRef idx="2">
-              <a:schemeClr val="accent1">
-                <a:shade val="15000"/>
-              </a:schemeClr>
-            </a:lnRef>
-            <a:fillRef idx="1">
-              <a:schemeClr val="accent1"/>
-            </a:fillRef>
-            <a:effectRef idx="0">
-              <a:schemeClr val="accent1"/>
-            </a:effectRef>
-            <a:fontRef idx="minor">
-              <a:schemeClr val="lt1"/>
-            </a:fontRef>
-          </p:style>
-          <p:txBody>
-            <a:bodyPr rtlCol="0" anchor="ctr"/>
-            <a:lstStyle/>
-            <a:p>
-              <a:pPr algn="ctr"/>
-              <a:endParaRPr lang="en-US"/>
-            </a:p>
-          </p:txBody>
-        </p:sp>
-        <p:pic>
-          <p:nvPicPr>
-            <p:cNvPr id="6" name="Graphic 5" descr="Bar chart with solid fill">
-              <a:extLst>
-                <a:ext uri="{FF2B5EF4-FFF2-40B4-BE49-F238E27FC236}">
-                  <a16:creationId xmlns:a16="http://schemas.microsoft.com/office/drawing/2014/main" id="{79E8B65B-8193-C04B-D3B6-CFD29886CDB7}"/>
-                </a:ext>
-              </a:extLst>
-            </p:cNvPr>
-            <p:cNvPicPr>
-              <a:picLocks noChangeAspect="1"/>
-            </p:cNvPicPr>
-            <p:nvPr/>
-          </p:nvPicPr>
-          <p:blipFill>
-            <a:blip>
-              <a:extLst>
-                <a:ext uri="{96DAC541-7B7A-43D3-8B79-37D633B846F1}">
-                  <asvg:svgBlip xmlns:asvg="http://schemas.microsoft.com/office/drawing/2016/SVG/main" r:embed="rId2"/>
-                </a:ext>
-              </a:extLst>
-            </a:blip>
-            <a:srcRect/>
-            <a:stretch/>
-          </p:blipFill>
-          <p:spPr>
-            <a:xfrm>
-              <a:off x="1635868" y="2376488"/>
-              <a:ext cx="3200400" cy="3200400"/>
+              <a:off x="1524000" y="3969603"/>
+              <a:ext cx="9144000" cy="830997"/>
             </a:xfrm>
             <a:prstGeom prst="rect">
               <a:avLst/>
             </a:prstGeom>
+            <a:noFill/>
           </p:spPr>
-        </p:pic>
+          <p:txBody>
+            <a:bodyPr wrap="square" rtlCol="0">
+              <a:spAutoFit/>
+            </a:bodyPr>
+            <a:lstStyle/>
+            <a:p>
+              <a:pPr algn="ctr"/>
+              <a:r>
+                <a:rPr lang="en-US" sz="4800" dirty="0">
+                  <a:solidFill>
+                    <a:schemeClr val="accent3"/>
+                  </a:solidFill>
+                </a:rPr>
+                <a:t>The Precision Advantage</a:t>
+              </a:r>
+            </a:p>
+          </p:txBody>
+        </p:sp>
+        <p:cxnSp>
+          <p:nvCxnSpPr>
+            <p:cNvPr id="13" name="Straight Connector 12">
+              <a:extLst>
+                <a:ext uri="{FF2B5EF4-FFF2-40B4-BE49-F238E27FC236}">
+                  <a16:creationId xmlns:a16="http://schemas.microsoft.com/office/drawing/2014/main" id="{9305F6D7-9415-4C36-F138-948C471C00C6}"/>
+                </a:ext>
+              </a:extLst>
+            </p:cNvPr>
+            <p:cNvCxnSpPr>
+              <a:cxnSpLocks/>
+            </p:cNvCxnSpPr>
+            <p:nvPr/>
+          </p:nvCxnSpPr>
+          <p:spPr>
+            <a:xfrm>
+              <a:off x="2671484" y="4800600"/>
+              <a:ext cx="6858000" cy="0"/>
+            </a:xfrm>
+            <a:prstGeom prst="line">
+              <a:avLst/>
+            </a:prstGeom>
+          </p:spPr>
+          <p:style>
+            <a:lnRef idx="2">
+              <a:schemeClr val="accent3"/>
+            </a:lnRef>
+            <a:fillRef idx="0">
+              <a:schemeClr val="accent3"/>
+            </a:fillRef>
+            <a:effectRef idx="1">
+              <a:schemeClr val="accent3"/>
+            </a:effectRef>
+            <a:fontRef idx="minor">
+              <a:schemeClr val="tx1"/>
+            </a:fontRef>
+          </p:style>
+        </p:cxnSp>
+        <p:sp>
+          <p:nvSpPr>
+            <p:cNvPr id="14" name="TextBox 13">
+              <a:extLst>
+                <a:ext uri="{FF2B5EF4-FFF2-40B4-BE49-F238E27FC236}">
+                  <a16:creationId xmlns:a16="http://schemas.microsoft.com/office/drawing/2014/main" id="{EC5E5116-5B25-C17B-1419-8ED8183A0C34}"/>
+                </a:ext>
+              </a:extLst>
+            </p:cNvPr>
+            <p:cNvSpPr txBox="1"/>
+            <p:nvPr/>
+          </p:nvSpPr>
+          <p:spPr>
+            <a:xfrm>
+              <a:off x="2057400" y="4800600"/>
+              <a:ext cx="8077200" cy="830997"/>
+            </a:xfrm>
+            <a:prstGeom prst="rect">
+              <a:avLst/>
+            </a:prstGeom>
+            <a:noFill/>
+          </p:spPr>
+          <p:txBody>
+            <a:bodyPr wrap="square" rtlCol="0">
+              <a:spAutoFit/>
+            </a:bodyPr>
+            <a:lstStyle/>
+            <a:p>
+              <a:pPr algn="ctr"/>
+              <a:r>
+                <a:rPr lang="en-US" sz="2400" dirty="0">
+                  <a:solidFill>
+                    <a:schemeClr val="bg1">
+                      <a:lumMod val="85000"/>
+                    </a:schemeClr>
+                  </a:solidFill>
+                  <a:latin typeface="Lato" panose="020F0502020204030203" pitchFamily="34" charset="0"/>
+                  <a:ea typeface="Lato" panose="020F0502020204030203" pitchFamily="34" charset="0"/>
+                  <a:cs typeface="Lato" panose="020F0502020204030203" pitchFamily="34" charset="0"/>
+                </a:rPr>
+                <a:t>XQMB 5311 · Quantitative Methods for Business</a:t>
+              </a:r>
+            </a:p>
+            <a:p>
+              <a:pPr algn="ctr"/>
+              <a:r>
+                <a:rPr lang="en-US" sz="2400" dirty="0">
+                  <a:solidFill>
+                    <a:schemeClr val="bg1">
+                      <a:lumMod val="85000"/>
+                    </a:schemeClr>
+                  </a:solidFill>
+                  <a:latin typeface="Lato" panose="020F0502020204030203" pitchFamily="34" charset="0"/>
+                  <a:ea typeface="Lato" panose="020F0502020204030203" pitchFamily="34" charset="0"/>
+                  <a:cs typeface="Lato" panose="020F0502020204030203" pitchFamily="34" charset="0"/>
+                </a:rPr>
+                <a:t>Nicolas Cachanosky · UTEP · Center for Free Enterprise</a:t>
+              </a:r>
+            </a:p>
+          </p:txBody>
+        </p:sp>
+        <p:grpSp>
+          <p:nvGrpSpPr>
+            <p:cNvPr id="7" name="Group 6">
+              <a:extLst>
+                <a:ext uri="{FF2B5EF4-FFF2-40B4-BE49-F238E27FC236}">
+                  <a16:creationId xmlns:a16="http://schemas.microsoft.com/office/drawing/2014/main" id="{1297BAF0-A8B4-D2F6-BB41-7C4CC8E27BE6}"/>
+                </a:ext>
+              </a:extLst>
+            </p:cNvPr>
+            <p:cNvGrpSpPr/>
+            <p:nvPr/>
+          </p:nvGrpSpPr>
+          <p:grpSpPr>
+            <a:xfrm>
+              <a:off x="4724400" y="1226403"/>
+              <a:ext cx="2743200" cy="2743200"/>
+              <a:chOff x="950068" y="1690688"/>
+              <a:chExt cx="4572000" cy="4572000"/>
+            </a:xfrm>
+          </p:grpSpPr>
+          <p:sp>
+            <p:nvSpPr>
+              <p:cNvPr id="5" name="Oval 4">
+                <a:extLst>
+                  <a:ext uri="{FF2B5EF4-FFF2-40B4-BE49-F238E27FC236}">
+                    <a16:creationId xmlns:a16="http://schemas.microsoft.com/office/drawing/2014/main" id="{A2A6BC05-A39F-DEF3-52E5-DC2D64581866}"/>
+                  </a:ext>
+                </a:extLst>
+              </p:cNvPr>
+              <p:cNvSpPr/>
+              <p:nvPr/>
+            </p:nvSpPr>
+            <p:spPr>
+              <a:xfrm>
+                <a:off x="950068" y="1690688"/>
+                <a:ext cx="4572000" cy="4572000"/>
+              </a:xfrm>
+              <a:prstGeom prst="ellipse">
+                <a:avLst/>
+              </a:prstGeom>
+              <a:noFill/>
+              <a:ln w="101600">
+                <a:solidFill>
+                  <a:schemeClr val="accent3"/>
+                </a:solidFill>
+              </a:ln>
+            </p:spPr>
+            <p:style>
+              <a:lnRef idx="2">
+                <a:schemeClr val="accent1">
+                  <a:shade val="15000"/>
+                </a:schemeClr>
+              </a:lnRef>
+              <a:fillRef idx="1">
+                <a:schemeClr val="accent1"/>
+              </a:fillRef>
+              <a:effectRef idx="0">
+                <a:schemeClr val="accent1"/>
+              </a:effectRef>
+              <a:fontRef idx="minor">
+                <a:schemeClr val="lt1"/>
+              </a:fontRef>
+            </p:style>
+            <p:txBody>
+              <a:bodyPr rtlCol="0" anchor="ctr"/>
+              <a:lstStyle/>
+              <a:p>
+                <a:pPr algn="ctr"/>
+                <a:endParaRPr lang="en-US"/>
+              </a:p>
+            </p:txBody>
+          </p:sp>
+          <p:pic>
+            <p:nvPicPr>
+              <p:cNvPr id="6" name="Graphic 5" descr="Bar chart with solid fill">
+                <a:extLst>
+                  <a:ext uri="{FF2B5EF4-FFF2-40B4-BE49-F238E27FC236}">
+                    <a16:creationId xmlns:a16="http://schemas.microsoft.com/office/drawing/2014/main" id="{79E8B65B-8193-C04B-D3B6-CFD29886CDB7}"/>
+                  </a:ext>
+                </a:extLst>
+              </p:cNvPr>
+              <p:cNvPicPr>
+                <a:picLocks noChangeAspect="1"/>
+              </p:cNvPicPr>
+              <p:nvPr/>
+            </p:nvPicPr>
+            <p:blipFill>
+              <a:blip>
+                <a:extLst>
+                  <a:ext uri="{96DAC541-7B7A-43D3-8B79-37D633B846F1}">
+                    <asvg:svgBlip xmlns:asvg="http://schemas.microsoft.com/office/drawing/2016/SVG/main" r:embed="rId2"/>
+                  </a:ext>
+                </a:extLst>
+              </a:blip>
+              <a:srcRect/>
+              <a:stretch/>
+            </p:blipFill>
+            <p:spPr>
+              <a:xfrm>
+                <a:off x="1635868" y="2376488"/>
+                <a:ext cx="3200400" cy="3200400"/>
+              </a:xfrm>
+              <a:prstGeom prst="rect">
+                <a:avLst/>
+              </a:prstGeom>
+            </p:spPr>
+          </p:pic>
+        </p:grpSp>
       </p:grpSp>
     </p:spTree>
     <p:extLst>
